--- a/docs/Phase B/Interactive_Mathematical_Proof_Verification_System_Presentation.pptx
+++ b/docs/Phase B/Interactive_Mathematical_Proof_Verification_System_Presentation.pptx
@@ -6964,8 +6964,8 @@
         </p:nvSpPr>
         <p:spPr>
           <a:xfrm rot="0">
-            <a:off x="1648763" y="3977188"/>
-            <a:ext cx="10961763" cy="3475641"/>
+            <a:off x="1648763" y="3977085"/>
+            <a:ext cx="10961763" cy="3475847"/>
           </a:xfrm>
           <a:prstGeom prst="rect">
             <a:avLst/>
@@ -6992,7 +6992,7 @@
                 <a:cs typeface="Garet"/>
                 <a:sym typeface="Garet"/>
               </a:rPr>
-              <a:t>ChatGPT-4o Mini Performance Issues</a:t>
+              <a:t>ChatGPT - 4o Mini Performance Issues</a:t>
             </a:r>
           </a:p>
           <a:p>
@@ -7049,7 +7049,7 @@
                 <a:cs typeface="Garet"/>
                 <a:sym typeface="Garet"/>
               </a:rPr>
-              <a:t>Agda’s Strict Syntax and GPT-4o Adaptation </a:t>
+              <a:t>Agda’s Strict Syntax and GPT - 4o Adaptation </a:t>
             </a:r>
           </a:p>
           <a:p>
@@ -8976,7 +8976,7 @@
                           <a:cs typeface="Garet"/>
                           <a:sym typeface="Garet"/>
                         </a:rPr>
-                        <a:t>  Input a valid natural language mathematical statement into ChatGPT-4o</a:t>
+                        <a:t>  Input a valid natural language mathematical statement into ChatGPT- 4o</a:t>
                       </a:r>
                     </a:p>
                     <a:p>
@@ -11265,8 +11265,8 @@
         </p:nvSpPr>
         <p:spPr>
           <a:xfrm rot="0">
-            <a:off x="1942206" y="3956429"/>
-            <a:ext cx="11700611" cy="4180424"/>
+            <a:off x="1942206" y="3956305"/>
+            <a:ext cx="11700611" cy="4180672"/>
           </a:xfrm>
           <a:prstGeom prst="rect">
             <a:avLst/>
@@ -11293,7 +11293,7 @@
                 <a:cs typeface="Garet"/>
                 <a:sym typeface="Garet"/>
               </a:rPr>
-              <a:t>Integrated ChatGPT-4o with Agda.</a:t>
+              <a:t>Integrated ChatGPT - 4o with Agda.</a:t>
             </a:r>
           </a:p>
           <a:p>
@@ -20569,148 +20569,102 @@
           </p:txBody>
         </p:sp>
       </p:grpSp>
-      <p:sp>
-        <p:nvSpPr>
-          <p:cNvPr name="Freeform 10" id="10"/>
-          <p:cNvSpPr/>
+      <p:grpSp>
+        <p:nvGrpSpPr>
+          <p:cNvPr name="Group 10" id="10"/>
+          <p:cNvGrpSpPr/>
           <p:nvPr/>
-        </p:nvSpPr>
-        <p:spPr>
-          <a:xfrm flipH="false" flipV="false" rot="6877328">
-            <a:off x="13879582" y="4305300"/>
-            <a:ext cx="1626012" cy="1203249"/>
-          </a:xfrm>
-          <a:custGeom>
-            <a:avLst/>
-            <a:gdLst/>
-            <a:ahLst/>
-            <a:cxnLst/>
-            <a:rect r="r" b="b" t="t" l="l"/>
-            <a:pathLst>
-              <a:path h="1203249" w="1626012">
-                <a:moveTo>
-                  <a:pt x="0" y="0"/>
-                </a:moveTo>
-                <a:lnTo>
-                  <a:pt x="1626012" y="0"/>
-                </a:lnTo>
-                <a:lnTo>
-                  <a:pt x="1626012" y="1203249"/>
-                </a:lnTo>
-                <a:lnTo>
-                  <a:pt x="0" y="1203249"/>
-                </a:lnTo>
-                <a:lnTo>
-                  <a:pt x="0" y="0"/>
-                </a:lnTo>
-                <a:close/>
-              </a:path>
-            </a:pathLst>
-          </a:custGeom>
-          <a:blipFill>
-            <a:blip r:embed="rId2">
-              <a:extLst>
-                <a:ext uri="{96DAC541-7B7A-43D3-8B79-37D633B846F1}">
-                  <asvg:svgBlip xmlns:asvg="http://schemas.microsoft.com/office/drawing/2016/SVG/main" r:embed="rId3"/>
-                </a:ext>
-              </a:extLst>
-            </a:blip>
-            <a:stretch>
-              <a:fillRect l="0" t="0" r="0" b="0"/>
-            </a:stretch>
-          </a:blipFill>
-          <a:ln cap="sq">
-            <a:noFill/>
-            <a:prstDash val="lgDash"/>
-            <a:miter/>
-          </a:ln>
-        </p:spPr>
-      </p:sp>
-      <p:sp>
-        <p:nvSpPr>
-          <p:cNvPr name="TextBox 11" id="11"/>
-          <p:cNvSpPr txBox="true"/>
-          <p:nvPr/>
-        </p:nvSpPr>
-        <p:spPr>
+        </p:nvGrpSpPr>
+        <p:grpSpPr>
           <a:xfrm rot="0">
-            <a:off x="6389132" y="1242938"/>
-            <a:ext cx="4570208" cy="870016"/>
-          </a:xfrm>
-          <a:prstGeom prst="rect">
-            <a:avLst/>
-          </a:prstGeom>
-        </p:spPr>
-        <p:txBody>
-          <a:bodyPr anchor="t" rtlCol="false" tIns="0" lIns="0" bIns="0" rIns="0">
-            <a:spAutoFit/>
-          </a:bodyPr>
-          <a:lstStyle/>
-          <a:p>
-            <a:pPr algn="ctr">
-              <a:lnSpc>
-                <a:spcPts val="6500"/>
-              </a:lnSpc>
-            </a:pPr>
-            <a:r>
-              <a:rPr lang="en-US" sz="6500">
-                <a:solidFill>
-                  <a:srgbClr val="FBFDF4"/>
-                </a:solidFill>
-                <a:latin typeface="League Spartan"/>
-                <a:ea typeface="League Spartan"/>
-                <a:cs typeface="League Spartan"/>
-                <a:sym typeface="League Spartan"/>
-              </a:rPr>
-              <a:t>Algorithm</a:t>
-            </a:r>
-          </a:p>
-        </p:txBody>
-      </p:sp>
-      <p:sp>
-        <p:nvSpPr>
-          <p:cNvPr name="TextBox 12" id="12"/>
-          <p:cNvSpPr txBox="true"/>
-          <p:nvPr/>
-        </p:nvSpPr>
-        <p:spPr>
-          <a:xfrm rot="0">
-            <a:off x="4981813" y="2761781"/>
-            <a:ext cx="7177560" cy="421391"/>
-          </a:xfrm>
-          <a:prstGeom prst="rect">
-            <a:avLst/>
-          </a:prstGeom>
-        </p:spPr>
-        <p:txBody>
-          <a:bodyPr anchor="t" rtlCol="false" tIns="0" lIns="0" bIns="0" rIns="0">
-            <a:spAutoFit/>
-          </a:bodyPr>
-          <a:lstStyle/>
-          <a:p>
-            <a:pPr algn="l">
-              <a:lnSpc>
-                <a:spcPts val="3378"/>
-              </a:lnSpc>
-              <a:spcBef>
-                <a:spcPct val="0"/>
-              </a:spcBef>
-            </a:pPr>
-            <a:r>
-              <a:rPr lang="en-US" sz="2815">
-                <a:solidFill>
-                  <a:srgbClr val="16123E"/>
-                </a:solidFill>
-                <a:latin typeface="Garet"/>
-                <a:ea typeface="Garet"/>
-                <a:cs typeface="Garet"/>
-                <a:sym typeface="Garet"/>
-              </a:rPr>
-              <a:t>Receive mathematical proof from user</a:t>
-            </a:r>
-          </a:p>
-        </p:txBody>
-      </p:sp>
+            <a:off x="3043022" y="3947642"/>
+            <a:ext cx="11070730" cy="787084"/>
+            <a:chOff x="0" y="0"/>
+            <a:chExt cx="6329033" cy="449969"/>
+          </a:xfrm>
+        </p:grpSpPr>
+        <p:sp>
+          <p:nvSpPr>
+            <p:cNvPr name="Freeform 11" id="11"/>
+            <p:cNvSpPr/>
+            <p:nvPr/>
+          </p:nvSpPr>
+          <p:spPr>
+            <a:xfrm flipH="false" flipV="false" rot="0">
+              <a:off x="0" y="0"/>
+              <a:ext cx="6329033" cy="449969"/>
+            </a:xfrm>
+            <a:custGeom>
+              <a:avLst/>
+              <a:gdLst/>
+              <a:ahLst/>
+              <a:cxnLst/>
+              <a:rect r="r" b="b" t="t" l="l"/>
+              <a:pathLst>
+                <a:path h="449969" w="6329033">
+                  <a:moveTo>
+                    <a:pt x="6125833" y="0"/>
+                  </a:moveTo>
+                  <a:cubicBezTo>
+                    <a:pt x="6238058" y="0"/>
+                    <a:pt x="6329033" y="100729"/>
+                    <a:pt x="6329033" y="224984"/>
+                  </a:cubicBezTo>
+                  <a:cubicBezTo>
+                    <a:pt x="6329033" y="349240"/>
+                    <a:pt x="6238058" y="449969"/>
+                    <a:pt x="6125833" y="449969"/>
+                  </a:cubicBezTo>
+                  <a:lnTo>
+                    <a:pt x="203200" y="449969"/>
+                  </a:lnTo>
+                  <a:cubicBezTo>
+                    <a:pt x="90976" y="449969"/>
+                    <a:pt x="0" y="349240"/>
+                    <a:pt x="0" y="224984"/>
+                  </a:cubicBezTo>
+                  <a:cubicBezTo>
+                    <a:pt x="0" y="100729"/>
+                    <a:pt x="90976" y="0"/>
+                    <a:pt x="203200" y="0"/>
+                  </a:cubicBezTo>
+                  <a:close/>
+                </a:path>
+              </a:pathLst>
+            </a:custGeom>
+            <a:solidFill>
+              <a:srgbClr val="C6C4D7"/>
+            </a:solidFill>
+          </p:spPr>
+        </p:sp>
+        <p:sp>
+          <p:nvSpPr>
+            <p:cNvPr name="TextBox 12" id="12"/>
+            <p:cNvSpPr txBox="true"/>
+            <p:nvPr/>
+          </p:nvSpPr>
+          <p:spPr>
+            <a:xfrm>
+              <a:off x="0" y="19050"/>
+              <a:ext cx="6329033" cy="430919"/>
+            </a:xfrm>
+            <a:prstGeom prst="rect">
+              <a:avLst/>
+            </a:prstGeom>
+          </p:spPr>
+          <p:txBody>
+            <a:bodyPr anchor="ctr" rtlCol="false" tIns="50800" lIns="50800" bIns="50800" rIns="50800"/>
+            <a:lstStyle/>
+            <a:p>
+              <a:pPr algn="ctr">
+                <a:lnSpc>
+                  <a:spcPts val="1942"/>
+                </a:lnSpc>
+              </a:pPr>
+            </a:p>
+          </p:txBody>
+        </p:sp>
+      </p:grpSp>
       <p:grpSp>
         <p:nvGrpSpPr>
           <p:cNvPr name="Group 13" id="13"/>
@@ -20719,7 +20673,7 @@
         </p:nvGrpSpPr>
         <p:grpSpPr>
           <a:xfrm rot="0">
-            <a:off x="3043022" y="3947642"/>
+            <a:off x="3043022" y="8058377"/>
             <a:ext cx="11070730" cy="787084"/>
             <a:chOff x="0" y="0"/>
             <a:chExt cx="6329033" cy="449969"/>
@@ -20809,279 +20763,7 @@
       </p:grpSp>
       <p:sp>
         <p:nvSpPr>
-          <p:cNvPr name="TextBox 16" id="16"/>
-          <p:cNvSpPr txBox="true"/>
-          <p:nvPr/>
-        </p:nvSpPr>
-        <p:spPr>
-          <a:xfrm rot="0">
-            <a:off x="4808332" y="4130456"/>
-            <a:ext cx="7515550" cy="421457"/>
-          </a:xfrm>
-          <a:prstGeom prst="rect">
-            <a:avLst/>
-          </a:prstGeom>
-        </p:spPr>
-        <p:txBody>
-          <a:bodyPr anchor="t" rtlCol="false" tIns="0" lIns="0" bIns="0" rIns="0">
-            <a:spAutoFit/>
-          </a:bodyPr>
-          <a:lstStyle/>
-          <a:p>
-            <a:pPr algn="l">
-              <a:lnSpc>
-                <a:spcPts val="3378"/>
-              </a:lnSpc>
-              <a:spcBef>
-                <a:spcPct val="0"/>
-              </a:spcBef>
-            </a:pPr>
-            <a:r>
-              <a:rPr lang="en-US" sz="2815">
-                <a:solidFill>
-                  <a:srgbClr val="16123E"/>
-                </a:solidFill>
-                <a:latin typeface="Garet"/>
-                <a:ea typeface="Garet"/>
-                <a:cs typeface="Garet"/>
-                <a:sym typeface="Garet"/>
-              </a:rPr>
-              <a:t>ChatGPT generates Agda code as proof </a:t>
-            </a:r>
-          </a:p>
-        </p:txBody>
-      </p:sp>
-      <p:sp>
-        <p:nvSpPr>
-          <p:cNvPr name="TextBox 17" id="17"/>
-          <p:cNvSpPr txBox="true"/>
-          <p:nvPr/>
-        </p:nvSpPr>
-        <p:spPr>
-          <a:xfrm rot="0">
-            <a:off x="4054574" y="5498862"/>
-            <a:ext cx="9047625" cy="421391"/>
-          </a:xfrm>
-          <a:prstGeom prst="rect">
-            <a:avLst/>
-          </a:prstGeom>
-        </p:spPr>
-        <p:txBody>
-          <a:bodyPr anchor="t" rtlCol="false" tIns="0" lIns="0" bIns="0" rIns="0">
-            <a:spAutoFit/>
-          </a:bodyPr>
-          <a:lstStyle/>
-          <a:p>
-            <a:pPr algn="l">
-              <a:lnSpc>
-                <a:spcPts val="3378"/>
-              </a:lnSpc>
-              <a:spcBef>
-                <a:spcPct val="0"/>
-              </a:spcBef>
-            </a:pPr>
-            <a:r>
-              <a:rPr lang="en-US" sz="2815">
-                <a:solidFill>
-                  <a:srgbClr val="16123E"/>
-                </a:solidFill>
-                <a:latin typeface="Garet"/>
-                <a:ea typeface="Garet"/>
-                <a:cs typeface="Garet"/>
-                <a:sym typeface="Garet"/>
-              </a:rPr>
-              <a:t>Verify generated mathematical proof using Agda</a:t>
-            </a:r>
-          </a:p>
-        </p:txBody>
-      </p:sp>
-      <p:grpSp>
-        <p:nvGrpSpPr>
-          <p:cNvPr name="Group 18" id="18"/>
-          <p:cNvGrpSpPr/>
-          <p:nvPr/>
-        </p:nvGrpSpPr>
-        <p:grpSpPr>
-          <a:xfrm rot="0">
-            <a:off x="3043022" y="8058377"/>
-            <a:ext cx="11070730" cy="787084"/>
-            <a:chOff x="0" y="0"/>
-            <a:chExt cx="6329033" cy="449969"/>
-          </a:xfrm>
-        </p:grpSpPr>
-        <p:sp>
-          <p:nvSpPr>
-            <p:cNvPr name="Freeform 19" id="19"/>
-            <p:cNvSpPr/>
-            <p:nvPr/>
-          </p:nvSpPr>
-          <p:spPr>
-            <a:xfrm flipH="false" flipV="false" rot="0">
-              <a:off x="0" y="0"/>
-              <a:ext cx="6329033" cy="449969"/>
-            </a:xfrm>
-            <a:custGeom>
-              <a:avLst/>
-              <a:gdLst/>
-              <a:ahLst/>
-              <a:cxnLst/>
-              <a:rect r="r" b="b" t="t" l="l"/>
-              <a:pathLst>
-                <a:path h="449969" w="6329033">
-                  <a:moveTo>
-                    <a:pt x="6125833" y="0"/>
-                  </a:moveTo>
-                  <a:cubicBezTo>
-                    <a:pt x="6238058" y="0"/>
-                    <a:pt x="6329033" y="100729"/>
-                    <a:pt x="6329033" y="224984"/>
-                  </a:cubicBezTo>
-                  <a:cubicBezTo>
-                    <a:pt x="6329033" y="349240"/>
-                    <a:pt x="6238058" y="449969"/>
-                    <a:pt x="6125833" y="449969"/>
-                  </a:cubicBezTo>
-                  <a:lnTo>
-                    <a:pt x="203200" y="449969"/>
-                  </a:lnTo>
-                  <a:cubicBezTo>
-                    <a:pt x="90976" y="449969"/>
-                    <a:pt x="0" y="349240"/>
-                    <a:pt x="0" y="224984"/>
-                  </a:cubicBezTo>
-                  <a:cubicBezTo>
-                    <a:pt x="0" y="100729"/>
-                    <a:pt x="90976" y="0"/>
-                    <a:pt x="203200" y="0"/>
-                  </a:cubicBezTo>
-                  <a:close/>
-                </a:path>
-              </a:pathLst>
-            </a:custGeom>
-            <a:solidFill>
-              <a:srgbClr val="C6C4D7"/>
-            </a:solidFill>
-          </p:spPr>
-        </p:sp>
-        <p:sp>
-          <p:nvSpPr>
-            <p:cNvPr name="TextBox 20" id="20"/>
-            <p:cNvSpPr txBox="true"/>
-            <p:nvPr/>
-          </p:nvSpPr>
-          <p:spPr>
-            <a:xfrm>
-              <a:off x="0" y="19050"/>
-              <a:ext cx="6329033" cy="430919"/>
-            </a:xfrm>
-            <a:prstGeom prst="rect">
-              <a:avLst/>
-            </a:prstGeom>
-          </p:spPr>
-          <p:txBody>
-            <a:bodyPr anchor="ctr" rtlCol="false" tIns="50800" lIns="50800" bIns="50800" rIns="50800"/>
-            <a:lstStyle/>
-            <a:p>
-              <a:pPr algn="ctr">
-                <a:lnSpc>
-                  <a:spcPts val="1942"/>
-                </a:lnSpc>
-              </a:pPr>
-            </a:p>
-          </p:txBody>
-        </p:sp>
-      </p:grpSp>
-      <p:sp>
-        <p:nvSpPr>
-          <p:cNvPr name="TextBox 21" id="21"/>
-          <p:cNvSpPr txBox="true"/>
-          <p:nvPr/>
-        </p:nvSpPr>
-        <p:spPr>
-          <a:xfrm rot="0">
-            <a:off x="5586768" y="8239352"/>
-            <a:ext cx="6189220" cy="421457"/>
-          </a:xfrm>
-          <a:prstGeom prst="rect">
-            <a:avLst/>
-          </a:prstGeom>
-        </p:spPr>
-        <p:txBody>
-          <a:bodyPr anchor="t" rtlCol="false" tIns="0" lIns="0" bIns="0" rIns="0">
-            <a:spAutoFit/>
-          </a:bodyPr>
-          <a:lstStyle/>
-          <a:p>
-            <a:pPr algn="l">
-              <a:lnSpc>
-                <a:spcPts val="3378"/>
-              </a:lnSpc>
-              <a:spcBef>
-                <a:spcPct val="0"/>
-              </a:spcBef>
-            </a:pPr>
-            <a:r>
-              <a:rPr lang="en-US" sz="2815">
-                <a:solidFill>
-                  <a:srgbClr val="16123E"/>
-                </a:solidFill>
-                <a:latin typeface="Garet"/>
-                <a:ea typeface="Garet"/>
-                <a:cs typeface="Garet"/>
-                <a:sym typeface="Garet"/>
-              </a:rPr>
-              <a:t>Send feedback back to ChatGPT</a:t>
-            </a:r>
-          </a:p>
-        </p:txBody>
-      </p:sp>
-      <p:sp>
-        <p:nvSpPr>
-          <p:cNvPr name="TextBox 22" id="22"/>
-          <p:cNvSpPr txBox="true"/>
-          <p:nvPr/>
-        </p:nvSpPr>
-        <p:spPr>
-          <a:xfrm rot="0">
-            <a:off x="15306557" y="4847870"/>
-            <a:ext cx="2392746" cy="402247"/>
-          </a:xfrm>
-          <a:prstGeom prst="rect">
-            <a:avLst/>
-          </a:prstGeom>
-        </p:spPr>
-        <p:txBody>
-          <a:bodyPr anchor="t" rtlCol="false" tIns="0" lIns="0" bIns="0" rIns="0">
-            <a:spAutoFit/>
-          </a:bodyPr>
-          <a:lstStyle/>
-          <a:p>
-            <a:pPr algn="ctr">
-              <a:lnSpc>
-                <a:spcPts val="3137"/>
-              </a:lnSpc>
-              <a:spcBef>
-                <a:spcPct val="0"/>
-              </a:spcBef>
-            </a:pPr>
-            <a:r>
-              <a:rPr lang="en-US" sz="2614">
-                <a:solidFill>
-                  <a:srgbClr val="16123E"/>
-                </a:solidFill>
-                <a:latin typeface="Garet"/>
-                <a:ea typeface="Garet"/>
-                <a:cs typeface="Garet"/>
-                <a:sym typeface="Garet"/>
-              </a:rPr>
-              <a:t>Refine proof </a:t>
-            </a:r>
-          </a:p>
-        </p:txBody>
-      </p:sp>
-      <p:sp>
-        <p:nvSpPr>
-          <p:cNvPr name="Freeform 23" id="23"/>
+          <p:cNvPr name="Freeform 16" id="16"/>
           <p:cNvSpPr/>
           <p:nvPr/>
         </p:nvSpPr>
@@ -21118,10 +20800,10 @@
             </a:pathLst>
           </a:custGeom>
           <a:blipFill>
-            <a:blip r:embed="rId4">
+            <a:blip r:embed="rId2">
               <a:extLst>
                 <a:ext uri="{96DAC541-7B7A-43D3-8B79-37D633B846F1}">
-                  <asvg:svgBlip xmlns:asvg="http://schemas.microsoft.com/office/drawing/2016/SVG/main" r:embed="rId5"/>
+                  <asvg:svgBlip xmlns:asvg="http://schemas.microsoft.com/office/drawing/2016/SVG/main" r:embed="rId3"/>
                 </a:ext>
               </a:extLst>
             </a:blip>
@@ -21133,7 +20815,7 @@
       </p:sp>
       <p:grpSp>
         <p:nvGrpSpPr>
-          <p:cNvPr name="Group 24" id="24"/>
+          <p:cNvPr name="Group 17" id="17"/>
           <p:cNvGrpSpPr>
             <a:grpSpLocks noChangeAspect="true"/>
           </p:cNvGrpSpPr>
@@ -21149,7 +20831,7 @@
         </p:grpSpPr>
         <p:sp>
           <p:nvSpPr>
-            <p:cNvPr name="Freeform 25" id="25"/>
+            <p:cNvPr name="Freeform 18" id="18"/>
             <p:cNvSpPr/>
             <p:nvPr/>
           </p:nvSpPr>
@@ -21265,7 +20947,7 @@
       </p:grpSp>
       <p:grpSp>
         <p:nvGrpSpPr>
-          <p:cNvPr name="Group 26" id="26"/>
+          <p:cNvPr name="Group 19" id="19"/>
           <p:cNvGrpSpPr/>
           <p:nvPr/>
         </p:nvGrpSpPr>
@@ -21279,7 +20961,7 @@
         </p:grpSpPr>
         <p:sp>
           <p:nvSpPr>
-            <p:cNvPr name="Freeform 27" id="27"/>
+            <p:cNvPr name="Freeform 20" id="20"/>
             <p:cNvSpPr/>
             <p:nvPr/>
           </p:nvSpPr>
@@ -21331,7 +21013,7 @@
       </p:grpSp>
       <p:grpSp>
         <p:nvGrpSpPr>
-          <p:cNvPr name="Group 28" id="28"/>
+          <p:cNvPr name="Group 21" id="21"/>
           <p:cNvGrpSpPr/>
           <p:nvPr/>
         </p:nvGrpSpPr>
@@ -21345,7 +21027,7 @@
         </p:grpSpPr>
         <p:sp>
           <p:nvSpPr>
-            <p:cNvPr name="Freeform 29" id="29"/>
+            <p:cNvPr name="Freeform 22" id="22"/>
             <p:cNvSpPr/>
             <p:nvPr/>
           </p:nvSpPr>
@@ -21399,7 +21081,7 @@
         </p:sp>
         <p:sp>
           <p:nvSpPr>
-            <p:cNvPr name="TextBox 30" id="30"/>
+            <p:cNvPr name="TextBox 23" id="23"/>
             <p:cNvSpPr txBox="true"/>
             <p:nvPr/>
           </p:nvSpPr>
@@ -21425,154 +21107,9 @@
           </p:txBody>
         </p:sp>
       </p:grpSp>
-      <p:sp>
-        <p:nvSpPr>
-          <p:cNvPr name="TextBox 31" id="31"/>
-          <p:cNvSpPr txBox="true"/>
-          <p:nvPr/>
-        </p:nvSpPr>
-        <p:spPr>
-          <a:xfrm rot="0">
-            <a:off x="4872872" y="6869107"/>
-            <a:ext cx="7617012" cy="421391"/>
-          </a:xfrm>
-          <a:prstGeom prst="rect">
-            <a:avLst/>
-          </a:prstGeom>
-        </p:spPr>
-        <p:txBody>
-          <a:bodyPr anchor="t" rtlCol="false" tIns="0" lIns="0" bIns="0" rIns="0">
-            <a:spAutoFit/>
-          </a:bodyPr>
-          <a:lstStyle/>
-          <a:p>
-            <a:pPr algn="l">
-              <a:lnSpc>
-                <a:spcPts val="3378"/>
-              </a:lnSpc>
-              <a:spcBef>
-                <a:spcPct val="0"/>
-              </a:spcBef>
-            </a:pPr>
-            <a:r>
-              <a:rPr lang="en-US" sz="2815">
-                <a:solidFill>
-                  <a:srgbClr val="16123E"/>
-                </a:solidFill>
-                <a:latin typeface="Garet"/>
-                <a:ea typeface="Garet"/>
-                <a:cs typeface="Garet"/>
-                <a:sym typeface="Garet"/>
-              </a:rPr>
-              <a:t>Verify context match to original problem</a:t>
-            </a:r>
-          </a:p>
-        </p:txBody>
-      </p:sp>
-      <p:sp>
-        <p:nvSpPr>
-          <p:cNvPr name="Freeform 32" id="32"/>
-          <p:cNvSpPr/>
-          <p:nvPr/>
-        </p:nvSpPr>
-        <p:spPr>
-          <a:xfrm flipH="false" flipV="true" rot="4144238">
-            <a:off x="994243" y="4678445"/>
-            <a:ext cx="2681728" cy="1984479"/>
-          </a:xfrm>
-          <a:custGeom>
-            <a:avLst/>
-            <a:gdLst/>
-            <a:ahLst/>
-            <a:cxnLst/>
-            <a:rect r="r" b="b" t="t" l="l"/>
-            <a:pathLst>
-              <a:path h="1984479" w="2681728">
-                <a:moveTo>
-                  <a:pt x="0" y="1984479"/>
-                </a:moveTo>
-                <a:lnTo>
-                  <a:pt x="2681729" y="1984479"/>
-                </a:lnTo>
-                <a:lnTo>
-                  <a:pt x="2681729" y="0"/>
-                </a:lnTo>
-                <a:lnTo>
-                  <a:pt x="0" y="0"/>
-                </a:lnTo>
-                <a:lnTo>
-                  <a:pt x="0" y="1984479"/>
-                </a:lnTo>
-                <a:close/>
-              </a:path>
-            </a:pathLst>
-          </a:custGeom>
-          <a:blipFill>
-            <a:blip r:embed="rId2">
-              <a:extLst>
-                <a:ext uri="{96DAC541-7B7A-43D3-8B79-37D633B846F1}">
-                  <asvg:svgBlip xmlns:asvg="http://schemas.microsoft.com/office/drawing/2016/SVG/main" r:embed="rId3"/>
-                </a:ext>
-              </a:extLst>
-            </a:blip>
-            <a:stretch>
-              <a:fillRect l="0" t="0" r="0" b="0"/>
-            </a:stretch>
-          </a:blipFill>
-          <a:ln cap="sq">
-            <a:noFill/>
-            <a:prstDash val="lgDash"/>
-            <a:miter/>
-          </a:ln>
-        </p:spPr>
-      </p:sp>
-      <p:sp>
-        <p:nvSpPr>
-          <p:cNvPr name="TextBox 33" id="33"/>
-          <p:cNvSpPr txBox="true"/>
-          <p:nvPr/>
-        </p:nvSpPr>
-        <p:spPr>
-          <a:xfrm rot="0">
-            <a:off x="400554" y="7071639"/>
-            <a:ext cx="2433299" cy="402247"/>
-          </a:xfrm>
-          <a:prstGeom prst="rect">
-            <a:avLst/>
-          </a:prstGeom>
-        </p:spPr>
-        <p:txBody>
-          <a:bodyPr anchor="t" rtlCol="false" tIns="0" lIns="0" bIns="0" rIns="0">
-            <a:spAutoFit/>
-          </a:bodyPr>
-          <a:lstStyle/>
-          <a:p>
-            <a:pPr algn="ctr">
-              <a:lnSpc>
-                <a:spcPts val="3137"/>
-              </a:lnSpc>
-              <a:spcBef>
-                <a:spcPct val="0"/>
-              </a:spcBef>
-            </a:pPr>
-            <a:r>
-              <a:rPr lang="en-US" sz="2614">
-                <a:solidFill>
-                  <a:srgbClr val="16123E"/>
-                </a:solidFill>
-                <a:latin typeface="Garet"/>
-                <a:ea typeface="Garet"/>
-                <a:cs typeface="Garet"/>
-                <a:sym typeface="Garet"/>
-              </a:rPr>
-              <a:t>Refine proof </a:t>
-            </a:r>
-          </a:p>
-        </p:txBody>
-      </p:sp>
       <p:grpSp>
         <p:nvGrpSpPr>
-          <p:cNvPr name="Group 34" id="34"/>
+          <p:cNvPr name="Group 24" id="24"/>
           <p:cNvGrpSpPr/>
           <p:nvPr/>
         </p:nvGrpSpPr>
@@ -21586,7 +21123,7 @@
         </p:grpSpPr>
         <p:sp>
           <p:nvSpPr>
-            <p:cNvPr name="Freeform 35" id="35"/>
+            <p:cNvPr name="Freeform 25" id="25"/>
             <p:cNvSpPr/>
             <p:nvPr/>
           </p:nvSpPr>
@@ -21640,7 +21177,7 @@
         </p:sp>
         <p:sp>
           <p:nvSpPr>
-            <p:cNvPr name="TextBox 36" id="36"/>
+            <p:cNvPr name="TextBox 26" id="26"/>
             <p:cNvSpPr txBox="true"/>
             <p:nvPr/>
           </p:nvSpPr>
@@ -21668,51 +21205,7 @@
       </p:grpSp>
       <p:sp>
         <p:nvSpPr>
-          <p:cNvPr name="TextBox 37" id="37"/>
-          <p:cNvSpPr txBox="true"/>
-          <p:nvPr/>
-        </p:nvSpPr>
-        <p:spPr>
-          <a:xfrm rot="0">
-            <a:off x="7214981" y="9609597"/>
-            <a:ext cx="2711225" cy="421391"/>
-          </a:xfrm>
-          <a:prstGeom prst="rect">
-            <a:avLst/>
-          </a:prstGeom>
-        </p:spPr>
-        <p:txBody>
-          <a:bodyPr anchor="t" rtlCol="false" tIns="0" lIns="0" bIns="0" rIns="0">
-            <a:spAutoFit/>
-          </a:bodyPr>
-          <a:lstStyle/>
-          <a:p>
-            <a:pPr algn="l">
-              <a:lnSpc>
-                <a:spcPts val="3378"/>
-              </a:lnSpc>
-              <a:spcBef>
-                <a:spcPct val="0"/>
-              </a:spcBef>
-            </a:pPr>
-            <a:r>
-              <a:rPr lang="en-US" sz="2815">
-                <a:solidFill>
-                  <a:srgbClr val="16123E"/>
-                </a:solidFill>
-                <a:latin typeface="Garet"/>
-                <a:ea typeface="Garet"/>
-                <a:cs typeface="Garet"/>
-                <a:sym typeface="Garet"/>
-              </a:rPr>
-              <a:t>Display results</a:t>
-            </a:r>
-          </a:p>
-        </p:txBody>
-      </p:sp>
-      <p:sp>
-        <p:nvSpPr>
-          <p:cNvPr name="Freeform 38" id="38"/>
+          <p:cNvPr name="Freeform 27" id="27"/>
           <p:cNvSpPr/>
           <p:nvPr/>
         </p:nvSpPr>
@@ -21749,10 +21242,10 @@
             </a:pathLst>
           </a:custGeom>
           <a:blipFill>
-            <a:blip r:embed="rId4">
+            <a:blip r:embed="rId2">
               <a:extLst>
                 <a:ext uri="{96DAC541-7B7A-43D3-8B79-37D633B846F1}">
-                  <asvg:svgBlip xmlns:asvg="http://schemas.microsoft.com/office/drawing/2016/SVG/main" r:embed="rId5"/>
+                  <asvg:svgBlip xmlns:asvg="http://schemas.microsoft.com/office/drawing/2016/SVG/main" r:embed="rId3"/>
                 </a:ext>
               </a:extLst>
             </a:blip>
@@ -21764,7 +21257,7 @@
       </p:sp>
       <p:sp>
         <p:nvSpPr>
-          <p:cNvPr name="Freeform 39" id="39"/>
+          <p:cNvPr name="Freeform 28" id="28"/>
           <p:cNvSpPr/>
           <p:nvPr/>
         </p:nvSpPr>
@@ -21801,10 +21294,10 @@
             </a:pathLst>
           </a:custGeom>
           <a:blipFill>
-            <a:blip r:embed="rId4">
+            <a:blip r:embed="rId2">
               <a:extLst>
                 <a:ext uri="{96DAC541-7B7A-43D3-8B79-37D633B846F1}">
-                  <asvg:svgBlip xmlns:asvg="http://schemas.microsoft.com/office/drawing/2016/SVG/main" r:embed="rId5"/>
+                  <asvg:svgBlip xmlns:asvg="http://schemas.microsoft.com/office/drawing/2016/SVG/main" r:embed="rId3"/>
                 </a:ext>
               </a:extLst>
             </a:blip>
@@ -21816,7 +21309,7 @@
       </p:sp>
       <p:sp>
         <p:nvSpPr>
-          <p:cNvPr name="Freeform 40" id="40"/>
+          <p:cNvPr name="Freeform 29" id="29"/>
           <p:cNvSpPr/>
           <p:nvPr/>
         </p:nvSpPr>
@@ -21853,10 +21346,10 @@
             </a:pathLst>
           </a:custGeom>
           <a:blipFill>
-            <a:blip r:embed="rId4">
+            <a:blip r:embed="rId2">
               <a:extLst>
                 <a:ext uri="{96DAC541-7B7A-43D3-8B79-37D633B846F1}">
-                  <asvg:svgBlip xmlns:asvg="http://schemas.microsoft.com/office/drawing/2016/SVG/main" r:embed="rId5"/>
+                  <asvg:svgBlip xmlns:asvg="http://schemas.microsoft.com/office/drawing/2016/SVG/main" r:embed="rId3"/>
                 </a:ext>
               </a:extLst>
             </a:blip>
@@ -21868,7 +21361,7 @@
       </p:sp>
       <p:sp>
         <p:nvSpPr>
-          <p:cNvPr name="Freeform 41" id="41"/>
+          <p:cNvPr name="Freeform 30" id="30"/>
           <p:cNvSpPr/>
           <p:nvPr/>
         </p:nvSpPr>
@@ -21905,6 +21398,58 @@
             </a:pathLst>
           </a:custGeom>
           <a:blipFill>
+            <a:blip r:embed="rId2">
+              <a:extLst>
+                <a:ext uri="{96DAC541-7B7A-43D3-8B79-37D633B846F1}">
+                  <asvg:svgBlip xmlns:asvg="http://schemas.microsoft.com/office/drawing/2016/SVG/main" r:embed="rId3"/>
+                </a:ext>
+              </a:extLst>
+            </a:blip>
+            <a:stretch>
+              <a:fillRect l="0" t="0" r="0" b="0"/>
+            </a:stretch>
+          </a:blipFill>
+        </p:spPr>
+      </p:sp>
+      <p:sp>
+        <p:nvSpPr>
+          <p:cNvPr name="Freeform 31" id="31"/>
+          <p:cNvSpPr/>
+          <p:nvPr/>
+        </p:nvSpPr>
+        <p:spPr>
+          <a:xfrm flipH="false" flipV="true" rot="-3659879">
+            <a:off x="12382201" y="4637427"/>
+            <a:ext cx="5848712" cy="4101410"/>
+          </a:xfrm>
+          <a:custGeom>
+            <a:avLst/>
+            <a:gdLst/>
+            <a:ahLst/>
+            <a:cxnLst/>
+            <a:rect r="r" b="b" t="t" l="l"/>
+            <a:pathLst>
+              <a:path h="4101410" w="5848712">
+                <a:moveTo>
+                  <a:pt x="0" y="4101410"/>
+                </a:moveTo>
+                <a:lnTo>
+                  <a:pt x="5848712" y="4101410"/>
+                </a:lnTo>
+                <a:lnTo>
+                  <a:pt x="5848712" y="0"/>
+                </a:lnTo>
+                <a:lnTo>
+                  <a:pt x="0" y="0"/>
+                </a:lnTo>
+                <a:lnTo>
+                  <a:pt x="0" y="4101410"/>
+                </a:lnTo>
+                <a:close/>
+              </a:path>
+            </a:pathLst>
+          </a:custGeom>
+          <a:blipFill>
             <a:blip r:embed="rId4">
               <a:extLst>
                 <a:ext uri="{96DAC541-7B7A-43D3-8B79-37D633B846F1}">
@@ -21917,6 +21462,355 @@
             </a:stretch>
           </a:blipFill>
         </p:spPr>
+      </p:sp>
+      <p:sp>
+        <p:nvSpPr>
+          <p:cNvPr name="TextBox 32" id="32"/>
+          <p:cNvSpPr txBox="true"/>
+          <p:nvPr/>
+        </p:nvSpPr>
+        <p:spPr>
+          <a:xfrm rot="0">
+            <a:off x="6389132" y="1242938"/>
+            <a:ext cx="4570208" cy="870016"/>
+          </a:xfrm>
+          <a:prstGeom prst="rect">
+            <a:avLst/>
+          </a:prstGeom>
+        </p:spPr>
+        <p:txBody>
+          <a:bodyPr anchor="t" rtlCol="false" tIns="0" lIns="0" bIns="0" rIns="0">
+            <a:spAutoFit/>
+          </a:bodyPr>
+          <a:lstStyle/>
+          <a:p>
+            <a:pPr algn="ctr">
+              <a:lnSpc>
+                <a:spcPts val="6500"/>
+              </a:lnSpc>
+            </a:pPr>
+            <a:r>
+              <a:rPr lang="en-US" sz="6500">
+                <a:solidFill>
+                  <a:srgbClr val="FBFDF4"/>
+                </a:solidFill>
+                <a:latin typeface="League Spartan"/>
+                <a:ea typeface="League Spartan"/>
+                <a:cs typeface="League Spartan"/>
+                <a:sym typeface="League Spartan"/>
+              </a:rPr>
+              <a:t>Algorithm</a:t>
+            </a:r>
+          </a:p>
+        </p:txBody>
+      </p:sp>
+      <p:sp>
+        <p:nvSpPr>
+          <p:cNvPr name="TextBox 33" id="33"/>
+          <p:cNvSpPr txBox="true"/>
+          <p:nvPr/>
+        </p:nvSpPr>
+        <p:spPr>
+          <a:xfrm rot="0">
+            <a:off x="4981813" y="2761781"/>
+            <a:ext cx="7177560" cy="421391"/>
+          </a:xfrm>
+          <a:prstGeom prst="rect">
+            <a:avLst/>
+          </a:prstGeom>
+        </p:spPr>
+        <p:txBody>
+          <a:bodyPr anchor="t" rtlCol="false" tIns="0" lIns="0" bIns="0" rIns="0">
+            <a:spAutoFit/>
+          </a:bodyPr>
+          <a:lstStyle/>
+          <a:p>
+            <a:pPr algn="l">
+              <a:lnSpc>
+                <a:spcPts val="3378"/>
+              </a:lnSpc>
+              <a:spcBef>
+                <a:spcPct val="0"/>
+              </a:spcBef>
+            </a:pPr>
+            <a:r>
+              <a:rPr lang="en-US" sz="2815">
+                <a:solidFill>
+                  <a:srgbClr val="16123E"/>
+                </a:solidFill>
+                <a:latin typeface="Garet"/>
+                <a:ea typeface="Garet"/>
+                <a:cs typeface="Garet"/>
+                <a:sym typeface="Garet"/>
+              </a:rPr>
+              <a:t>Receive mathematical proof from user</a:t>
+            </a:r>
+          </a:p>
+        </p:txBody>
+      </p:sp>
+      <p:sp>
+        <p:nvSpPr>
+          <p:cNvPr name="TextBox 34" id="34"/>
+          <p:cNvSpPr txBox="true"/>
+          <p:nvPr/>
+        </p:nvSpPr>
+        <p:spPr>
+          <a:xfrm rot="0">
+            <a:off x="4808332" y="4130456"/>
+            <a:ext cx="7515550" cy="421457"/>
+          </a:xfrm>
+          <a:prstGeom prst="rect">
+            <a:avLst/>
+          </a:prstGeom>
+        </p:spPr>
+        <p:txBody>
+          <a:bodyPr anchor="t" rtlCol="false" tIns="0" lIns="0" bIns="0" rIns="0">
+            <a:spAutoFit/>
+          </a:bodyPr>
+          <a:lstStyle/>
+          <a:p>
+            <a:pPr algn="l">
+              <a:lnSpc>
+                <a:spcPts val="3378"/>
+              </a:lnSpc>
+              <a:spcBef>
+                <a:spcPct val="0"/>
+              </a:spcBef>
+            </a:pPr>
+            <a:r>
+              <a:rPr lang="en-US" sz="2815">
+                <a:solidFill>
+                  <a:srgbClr val="16123E"/>
+                </a:solidFill>
+                <a:latin typeface="Garet"/>
+                <a:ea typeface="Garet"/>
+                <a:cs typeface="Garet"/>
+                <a:sym typeface="Garet"/>
+              </a:rPr>
+              <a:t>ChatGPT generates Agda code as proof </a:t>
+            </a:r>
+          </a:p>
+        </p:txBody>
+      </p:sp>
+      <p:sp>
+        <p:nvSpPr>
+          <p:cNvPr name="TextBox 35" id="35"/>
+          <p:cNvSpPr txBox="true"/>
+          <p:nvPr/>
+        </p:nvSpPr>
+        <p:spPr>
+          <a:xfrm rot="0">
+            <a:off x="4054574" y="5498862"/>
+            <a:ext cx="9047625" cy="421391"/>
+          </a:xfrm>
+          <a:prstGeom prst="rect">
+            <a:avLst/>
+          </a:prstGeom>
+        </p:spPr>
+        <p:txBody>
+          <a:bodyPr anchor="t" rtlCol="false" tIns="0" lIns="0" bIns="0" rIns="0">
+            <a:spAutoFit/>
+          </a:bodyPr>
+          <a:lstStyle/>
+          <a:p>
+            <a:pPr algn="l">
+              <a:lnSpc>
+                <a:spcPts val="3378"/>
+              </a:lnSpc>
+              <a:spcBef>
+                <a:spcPct val="0"/>
+              </a:spcBef>
+            </a:pPr>
+            <a:r>
+              <a:rPr lang="en-US" sz="2815">
+                <a:solidFill>
+                  <a:srgbClr val="16123E"/>
+                </a:solidFill>
+                <a:latin typeface="Garet"/>
+                <a:ea typeface="Garet"/>
+                <a:cs typeface="Garet"/>
+                <a:sym typeface="Garet"/>
+              </a:rPr>
+              <a:t>Verify generated mathematical proof using Agda</a:t>
+            </a:r>
+          </a:p>
+        </p:txBody>
+      </p:sp>
+      <p:sp>
+        <p:nvSpPr>
+          <p:cNvPr name="TextBox 36" id="36"/>
+          <p:cNvSpPr txBox="true"/>
+          <p:nvPr/>
+        </p:nvSpPr>
+        <p:spPr>
+          <a:xfrm rot="0">
+            <a:off x="5586768" y="8239352"/>
+            <a:ext cx="6189220" cy="421457"/>
+          </a:xfrm>
+          <a:prstGeom prst="rect">
+            <a:avLst/>
+          </a:prstGeom>
+        </p:spPr>
+        <p:txBody>
+          <a:bodyPr anchor="t" rtlCol="false" tIns="0" lIns="0" bIns="0" rIns="0">
+            <a:spAutoFit/>
+          </a:bodyPr>
+          <a:lstStyle/>
+          <a:p>
+            <a:pPr algn="l">
+              <a:lnSpc>
+                <a:spcPts val="3378"/>
+              </a:lnSpc>
+              <a:spcBef>
+                <a:spcPct val="0"/>
+              </a:spcBef>
+            </a:pPr>
+            <a:r>
+              <a:rPr lang="en-US" sz="2815">
+                <a:solidFill>
+                  <a:srgbClr val="16123E"/>
+                </a:solidFill>
+                <a:latin typeface="Garet"/>
+                <a:ea typeface="Garet"/>
+                <a:cs typeface="Garet"/>
+                <a:sym typeface="Garet"/>
+              </a:rPr>
+              <a:t>Send feedback back to ChatGPT</a:t>
+            </a:r>
+          </a:p>
+        </p:txBody>
+      </p:sp>
+      <p:sp>
+        <p:nvSpPr>
+          <p:cNvPr name="TextBox 37" id="37"/>
+          <p:cNvSpPr txBox="true"/>
+          <p:nvPr/>
+        </p:nvSpPr>
+        <p:spPr>
+          <a:xfrm rot="0">
+            <a:off x="15706057" y="4331660"/>
+            <a:ext cx="2392746" cy="402247"/>
+          </a:xfrm>
+          <a:prstGeom prst="rect">
+            <a:avLst/>
+          </a:prstGeom>
+        </p:spPr>
+        <p:txBody>
+          <a:bodyPr anchor="t" rtlCol="false" tIns="0" lIns="0" bIns="0" rIns="0">
+            <a:spAutoFit/>
+          </a:bodyPr>
+          <a:lstStyle/>
+          <a:p>
+            <a:pPr algn="ctr">
+              <a:lnSpc>
+                <a:spcPts val="3137"/>
+              </a:lnSpc>
+              <a:spcBef>
+                <a:spcPct val="0"/>
+              </a:spcBef>
+            </a:pPr>
+            <a:r>
+              <a:rPr lang="en-US" sz="2614">
+                <a:solidFill>
+                  <a:srgbClr val="16123E"/>
+                </a:solidFill>
+                <a:latin typeface="Garet"/>
+                <a:ea typeface="Garet"/>
+                <a:cs typeface="Garet"/>
+                <a:sym typeface="Garet"/>
+              </a:rPr>
+              <a:t>Refine proof </a:t>
+            </a:r>
+          </a:p>
+        </p:txBody>
+      </p:sp>
+      <p:sp>
+        <p:nvSpPr>
+          <p:cNvPr name="TextBox 38" id="38"/>
+          <p:cNvSpPr txBox="true"/>
+          <p:nvPr/>
+        </p:nvSpPr>
+        <p:spPr>
+          <a:xfrm rot="0">
+            <a:off x="4872872" y="6869107"/>
+            <a:ext cx="7617012" cy="421391"/>
+          </a:xfrm>
+          <a:prstGeom prst="rect">
+            <a:avLst/>
+          </a:prstGeom>
+        </p:spPr>
+        <p:txBody>
+          <a:bodyPr anchor="t" rtlCol="false" tIns="0" lIns="0" bIns="0" rIns="0">
+            <a:spAutoFit/>
+          </a:bodyPr>
+          <a:lstStyle/>
+          <a:p>
+            <a:pPr algn="l">
+              <a:lnSpc>
+                <a:spcPts val="3378"/>
+              </a:lnSpc>
+              <a:spcBef>
+                <a:spcPct val="0"/>
+              </a:spcBef>
+            </a:pPr>
+            <a:r>
+              <a:rPr lang="en-US" sz="2815">
+                <a:solidFill>
+                  <a:srgbClr val="16123E"/>
+                </a:solidFill>
+                <a:latin typeface="Garet"/>
+                <a:ea typeface="Garet"/>
+                <a:cs typeface="Garet"/>
+                <a:sym typeface="Garet"/>
+              </a:rPr>
+              <a:t>Verify context match to original problem</a:t>
+            </a:r>
+          </a:p>
+        </p:txBody>
+      </p:sp>
+      <p:sp>
+        <p:nvSpPr>
+          <p:cNvPr name="TextBox 39" id="39"/>
+          <p:cNvSpPr txBox="true"/>
+          <p:nvPr/>
+        </p:nvSpPr>
+        <p:spPr>
+          <a:xfrm rot="0">
+            <a:off x="7214981" y="9609597"/>
+            <a:ext cx="2711225" cy="421391"/>
+          </a:xfrm>
+          <a:prstGeom prst="rect">
+            <a:avLst/>
+          </a:prstGeom>
+        </p:spPr>
+        <p:txBody>
+          <a:bodyPr anchor="t" rtlCol="false" tIns="0" lIns="0" bIns="0" rIns="0">
+            <a:spAutoFit/>
+          </a:bodyPr>
+          <a:lstStyle/>
+          <a:p>
+            <a:pPr algn="l">
+              <a:lnSpc>
+                <a:spcPts val="3378"/>
+              </a:lnSpc>
+              <a:spcBef>
+                <a:spcPct val="0"/>
+              </a:spcBef>
+            </a:pPr>
+            <a:r>
+              <a:rPr lang="en-US" sz="2815">
+                <a:solidFill>
+                  <a:srgbClr val="16123E"/>
+                </a:solidFill>
+                <a:latin typeface="Garet"/>
+                <a:ea typeface="Garet"/>
+                <a:cs typeface="Garet"/>
+                <a:sym typeface="Garet"/>
+              </a:rPr>
+              <a:t>Display results</a:t>
+            </a:r>
+          </a:p>
+        </p:txBody>
       </p:sp>
     </p:spTree>
   </p:cSld>
